--- a/springflow_protection.pptx
+++ b/springflow_protection.pptx
@@ -122,14 +122,6 @@
 </p:presentation>
 </file>
 
-<file path=ppt/revisionInfo.xml><?xml version="1.0" encoding="utf-8"?>
-<p1510:revInfo xmlns:a="http://schemas.openxmlformats.org/drawingml/2006/main" xmlns:r="http://schemas.openxmlformats.org/officeDocument/2006/relationships" xmlns:p1510="http://schemas.microsoft.com/office/powerpoint/2015/10/main">
-  <p1510:revLst>
-    <p1510:client id="{8E998EA6-B6BB-4600-9C7E-4EDEA07735E4}" v="1961" dt="2026-07-22T21:24:53.344"/>
-  </p1510:revLst>
-</p1510:revInfo>
-</file>
-
 <file path=ppt/changesInfos/changesInfo1.xml><?xml version="1.0" encoding="utf-8"?>
 <pc:chgInfo xmlns:a="http://schemas.openxmlformats.org/drawingml/2006/main" xmlns:r="http://schemas.openxmlformats.org/officeDocument/2006/relationships" xmlns:ac="http://schemas.microsoft.com/office/drawing/2013/main/command" xmlns:pc="http://schemas.microsoft.com/office/powerpoint/2013/main/command">
   <pc:docChgLst>
@@ -188,7 +180,7 @@
   <pc:docChgLst>
     <pc:chgData name="Chad Furl" userId="e1f063c0-f891-481e-b162-0b825299f031" providerId="ADAL" clId="{3E978C21-B3D0-4285-96BE-5AD851B5E1C0}"/>
     <pc:docChg chg="undo custSel addSld modSld sldOrd">
-      <pc:chgData name="Chad Furl" userId="e1f063c0-f891-481e-b162-0b825299f031" providerId="ADAL" clId="{3E978C21-B3D0-4285-96BE-5AD851B5E1C0}" dt="2026-07-22T21:24:53.344" v="1962" actId="20577"/>
+      <pc:chgData name="Chad Furl" userId="e1f063c0-f891-481e-b162-0b825299f031" providerId="ADAL" clId="{3E978C21-B3D0-4285-96BE-5AD851B5E1C0}" dt="2026-07-24T20:17:57.611" v="2119" actId="20577"/>
       <pc:docMkLst>
         <pc:docMk/>
       </pc:docMkLst>
@@ -376,7 +368,7 @@
         </pc:spChg>
       </pc:sldChg>
       <pc:sldChg chg="modSp new mod">
-        <pc:chgData name="Chad Furl" userId="e1f063c0-f891-481e-b162-0b825299f031" providerId="ADAL" clId="{3E978C21-B3D0-4285-96BE-5AD851B5E1C0}" dt="2026-07-20T21:21:28.550" v="1815"/>
+        <pc:chgData name="Chad Furl" userId="e1f063c0-f891-481e-b162-0b825299f031" providerId="ADAL" clId="{3E978C21-B3D0-4285-96BE-5AD851B5E1C0}" dt="2026-07-24T20:17:57.611" v="2119" actId="20577"/>
         <pc:sldMkLst>
           <pc:docMk/>
           <pc:sldMk cId="413581659" sldId="267"/>
@@ -390,7 +382,7 @@
           </ac:spMkLst>
         </pc:spChg>
         <pc:spChg chg="mod">
-          <ac:chgData name="Chad Furl" userId="e1f063c0-f891-481e-b162-0b825299f031" providerId="ADAL" clId="{3E978C21-B3D0-4285-96BE-5AD851B5E1C0}" dt="2026-07-20T21:21:28.550" v="1815"/>
+          <ac:chgData name="Chad Furl" userId="e1f063c0-f891-481e-b162-0b825299f031" providerId="ADAL" clId="{3E978C21-B3D0-4285-96BE-5AD851B5E1C0}" dt="2026-07-24T20:17:57.611" v="2119" actId="20577"/>
           <ac:spMkLst>
             <pc:docMk/>
             <pc:sldMk cId="413581659" sldId="267"/>
@@ -610,7 +602,7 @@
           <a:p>
             <a:fld id="{B08F4C1E-3527-44F2-9D59-10FE85C7F17B}" type="datetimeFigureOut">
               <a:rPr lang="en-US" smtClean="0"/>
-              <a:t>7/20/2026</a:t>
+              <a:t>7/24/2026</a:t>
             </a:fld>
             <a:endParaRPr lang="en-US"/>
           </a:p>
@@ -808,7 +800,7 @@
           <a:p>
             <a:fld id="{B08F4C1E-3527-44F2-9D59-10FE85C7F17B}" type="datetimeFigureOut">
               <a:rPr lang="en-US" smtClean="0"/>
-              <a:t>7/20/2026</a:t>
+              <a:t>7/24/2026</a:t>
             </a:fld>
             <a:endParaRPr lang="en-US"/>
           </a:p>
@@ -1016,7 +1008,7 @@
           <a:p>
             <a:fld id="{B08F4C1E-3527-44F2-9D59-10FE85C7F17B}" type="datetimeFigureOut">
               <a:rPr lang="en-US" smtClean="0"/>
-              <a:t>7/20/2026</a:t>
+              <a:t>7/24/2026</a:t>
             </a:fld>
             <a:endParaRPr lang="en-US"/>
           </a:p>
@@ -1214,7 +1206,7 @@
           <a:p>
             <a:fld id="{B08F4C1E-3527-44F2-9D59-10FE85C7F17B}" type="datetimeFigureOut">
               <a:rPr lang="en-US" smtClean="0"/>
-              <a:t>7/20/2026</a:t>
+              <a:t>7/24/2026</a:t>
             </a:fld>
             <a:endParaRPr lang="en-US"/>
           </a:p>
@@ -1489,7 +1481,7 @@
           <a:p>
             <a:fld id="{B08F4C1E-3527-44F2-9D59-10FE85C7F17B}" type="datetimeFigureOut">
               <a:rPr lang="en-US" smtClean="0"/>
-              <a:t>7/20/2026</a:t>
+              <a:t>7/24/2026</a:t>
             </a:fld>
             <a:endParaRPr lang="en-US"/>
           </a:p>
@@ -1754,7 +1746,7 @@
           <a:p>
             <a:fld id="{B08F4C1E-3527-44F2-9D59-10FE85C7F17B}" type="datetimeFigureOut">
               <a:rPr lang="en-US" smtClean="0"/>
-              <a:t>7/20/2026</a:t>
+              <a:t>7/24/2026</a:t>
             </a:fld>
             <a:endParaRPr lang="en-US"/>
           </a:p>
@@ -2166,7 +2158,7 @@
           <a:p>
             <a:fld id="{B08F4C1E-3527-44F2-9D59-10FE85C7F17B}" type="datetimeFigureOut">
               <a:rPr lang="en-US" smtClean="0"/>
-              <a:t>7/20/2026</a:t>
+              <a:t>7/24/2026</a:t>
             </a:fld>
             <a:endParaRPr lang="en-US"/>
           </a:p>
@@ -2307,7 +2299,7 @@
           <a:p>
             <a:fld id="{B08F4C1E-3527-44F2-9D59-10FE85C7F17B}" type="datetimeFigureOut">
               <a:rPr lang="en-US" smtClean="0"/>
-              <a:t>7/20/2026</a:t>
+              <a:t>7/24/2026</a:t>
             </a:fld>
             <a:endParaRPr lang="en-US"/>
           </a:p>
@@ -2420,7 +2412,7 @@
           <a:p>
             <a:fld id="{B08F4C1E-3527-44F2-9D59-10FE85C7F17B}" type="datetimeFigureOut">
               <a:rPr lang="en-US" smtClean="0"/>
-              <a:t>7/20/2026</a:t>
+              <a:t>7/24/2026</a:t>
             </a:fld>
             <a:endParaRPr lang="en-US"/>
           </a:p>
@@ -2731,7 +2723,7 @@
           <a:p>
             <a:fld id="{B08F4C1E-3527-44F2-9D59-10FE85C7F17B}" type="datetimeFigureOut">
               <a:rPr lang="en-US" smtClean="0"/>
-              <a:t>7/20/2026</a:t>
+              <a:t>7/24/2026</a:t>
             </a:fld>
             <a:endParaRPr lang="en-US"/>
           </a:p>
@@ -3019,7 +3011,7 @@
           <a:p>
             <a:fld id="{B08F4C1E-3527-44F2-9D59-10FE85C7F17B}" type="datetimeFigureOut">
               <a:rPr lang="en-US" smtClean="0"/>
-              <a:t>7/20/2026</a:t>
+              <a:t>7/24/2026</a:t>
             </a:fld>
             <a:endParaRPr lang="en-US"/>
           </a:p>
@@ -3260,7 +3252,7 @@
           <a:p>
             <a:fld id="{B08F4C1E-3527-44F2-9D59-10FE85C7F17B}" type="datetimeFigureOut">
               <a:rPr lang="en-US" smtClean="0"/>
-              <a:t>7/20/2026</a:t>
+              <a:t>7/24/2026</a:t>
             </a:fld>
             <a:endParaRPr lang="en-US"/>
           </a:p>
@@ -3698,7 +3690,7 @@
           <a:bodyPr/>
           <a:lstStyle/>
           <a:p>
-            <a:endParaRPr lang="en-US" dirty="0"/>
+            <a:endParaRPr lang="en-US"/>
           </a:p>
         </p:txBody>
       </p:sp>
@@ -3821,21 +3813,21 @@
           <a:lstStyle/>
           <a:p>
             <a:r>
-              <a:rPr lang="en-US" dirty="0"/>
+              <a:rPr lang="en-US"/>
               <a:t>Describe the package that they came up with to meet minimum </a:t>
             </a:r>
             <a:r>
-              <a:rPr lang="en-US" dirty="0" err="1"/>
+              <a:rPr lang="en-US" err="1"/>
               <a:t>springflow</a:t>
             </a:r>
             <a:r>
-              <a:rPr lang="en-US" dirty="0"/>
+              <a:rPr lang="en-US"/>
               <a:t> during a repeat of the DOR, Vol, trigger.</a:t>
             </a:r>
           </a:p>
           <a:p>
             <a:r>
-              <a:rPr lang="en-US" dirty="0"/>
+              <a:rPr lang="en-US"/>
               <a:t>Bottom up package Appendix K</a:t>
             </a:r>
           </a:p>
@@ -3988,7 +3980,7 @@
           <a:lstStyle/>
           <a:p>
             <a:r>
-              <a:rPr lang="en-US" dirty="0"/>
+              <a:rPr lang="en-US"/>
               <a:t>VISPO</a:t>
             </a:r>
           </a:p>
@@ -4077,7 +4069,7 @@
           <a:lstStyle/>
           <a:p>
             <a:r>
-              <a:rPr lang="en-US" dirty="0"/>
+              <a:rPr lang="en-US"/>
               <a:t>RWCP/STGV</a:t>
             </a:r>
           </a:p>
@@ -4194,27 +4186,27 @@
           <a:lstStyle/>
           <a:p>
             <a:r>
-              <a:rPr lang="en-US" dirty="0"/>
+              <a:rPr lang="en-US"/>
               <a:t>How often have SF measures been triggered? How much pumping has been curtailed as a result?</a:t>
             </a:r>
           </a:p>
           <a:p>
             <a:r>
-              <a:rPr lang="en-US" dirty="0"/>
+              <a:rPr lang="en-US"/>
               <a:t>What is the estimated vs authorized pumping for 2013 to present.</a:t>
             </a:r>
           </a:p>
           <a:p>
             <a:r>
-              <a:rPr lang="en-US" dirty="0"/>
+              <a:rPr lang="en-US"/>
               <a:t>J17/</a:t>
             </a:r>
             <a:r>
-              <a:rPr lang="en-US" dirty="0" err="1"/>
+              <a:rPr lang="en-US" err="1"/>
               <a:t>springflow</a:t>
             </a:r>
             <a:r>
-              <a:rPr lang="en-US" dirty="0"/>
+              <a:rPr lang="en-US"/>
               <a:t> notes</a:t>
             </a:r>
           </a:p>
@@ -4278,7 +4270,7 @@
           <a:lstStyle/>
           <a:p>
             <a:r>
-              <a:rPr lang="en-US" dirty="0"/>
+              <a:rPr lang="en-US"/>
               <a:t>ASR</a:t>
             </a:r>
           </a:p>
@@ -4306,7 +4298,7 @@
           <a:lstStyle/>
           <a:p>
             <a:r>
-              <a:rPr lang="en-US" dirty="0"/>
+              <a:rPr lang="en-US"/>
               <a:t>What is going down in 2027?</a:t>
             </a:r>
           </a:p>
@@ -4398,7 +4390,7 @@
           <a:lstStyle/>
           <a:p>
             <a:r>
-              <a:rPr lang="en-US" dirty="0"/>
+              <a:rPr lang="en-US"/>
               <a:t>What is proposed in next HCP?</a:t>
             </a:r>
           </a:p>
@@ -4587,13 +4579,13 @@
           <a:lstStyle/>
           <a:p>
             <a:r>
-              <a:rPr lang="en-US" dirty="0"/>
+              <a:rPr lang="en-US"/>
               <a:t>Permitting system</a:t>
             </a:r>
           </a:p>
           <a:p>
             <a:r>
-              <a:rPr lang="en-US" dirty="0"/>
+              <a:rPr lang="en-US"/>
               <a:t>Some level of detail about the history of the permitting system</a:t>
             </a:r>
           </a:p>
@@ -4685,42 +4677,42 @@
           <a:lstStyle/>
           <a:p>
             <a:r>
-              <a:rPr lang="en-US" dirty="0"/>
+              <a:rPr lang="en-US"/>
               <a:t>Modern implementation of permitting system</a:t>
             </a:r>
           </a:p>
           <a:p>
             <a:pPr lvl="1"/>
             <a:r>
-              <a:rPr lang="en-US" dirty="0"/>
+              <a:rPr lang="en-US"/>
               <a:t>Use type </a:t>
             </a:r>
           </a:p>
           <a:p>
             <a:pPr lvl="1"/>
             <a:r>
-              <a:rPr lang="en-US" dirty="0"/>
+              <a:rPr lang="en-US"/>
               <a:t>Number of permittees</a:t>
             </a:r>
           </a:p>
           <a:p>
             <a:pPr lvl="1"/>
             <a:r>
-              <a:rPr lang="en-US" dirty="0"/>
+              <a:rPr lang="en-US"/>
               <a:t>Base versus unrestricted</a:t>
             </a:r>
           </a:p>
           <a:p>
             <a:pPr lvl="1"/>
             <a:r>
-              <a:rPr lang="en-US" dirty="0"/>
+              <a:rPr lang="en-US"/>
               <a:t>Pumping cap</a:t>
             </a:r>
           </a:p>
           <a:p>
             <a:pPr lvl="1"/>
             <a:r>
-              <a:rPr lang="en-US" dirty="0"/>
+              <a:rPr lang="en-US"/>
               <a:t>Unpermitted pumping</a:t>
             </a:r>
           </a:p>
@@ -4812,40 +4804,35 @@
           <a:lstStyle/>
           <a:p>
             <a:r>
-              <a:rPr lang="en-US" dirty="0"/>
+              <a:rPr lang="en-US"/>
               <a:t>Data look at modern implementation of permitting system</a:t>
             </a:r>
           </a:p>
           <a:p>
             <a:pPr lvl="1"/>
             <a:r>
-              <a:rPr lang="en-US" dirty="0"/>
+              <a:rPr lang="en-US"/>
               <a:t>Use type (what percentage of GW is allocated to each type) DONE</a:t>
             </a:r>
           </a:p>
           <a:p>
             <a:pPr lvl="1"/>
             <a:r>
-              <a:rPr lang="en-US" dirty="0"/>
-              <a:t>Base versus unrestricted (same </a:t>
-            </a:r>
-            <a:r>
-              <a:rPr lang="en-US"/>
-              <a:t>question)DONE</a:t>
-            </a:r>
-            <a:endParaRPr lang="en-US" dirty="0"/>
+              <a:rPr lang="en-US"/>
+              <a:t>Base versus unrestricted (same question)DONE</a:t>
+            </a:r>
           </a:p>
           <a:p>
             <a:pPr lvl="1"/>
             <a:r>
-              <a:rPr lang="en-US" dirty="0"/>
+              <a:rPr lang="en-US"/>
               <a:t>Pumping cap (show pumping cap prior to any stage restriction levies) DONE</a:t>
             </a:r>
           </a:p>
           <a:p>
             <a:pPr lvl="1"/>
             <a:r>
-              <a:rPr lang="en-US" dirty="0"/>
+              <a:rPr lang="en-US"/>
               <a:t>How is the water distributed across counties by vol and use type? DONE.</a:t>
             </a:r>
           </a:p>
@@ -4931,13 +4918,13 @@
           <a:lstStyle/>
           <a:p>
             <a:r>
-              <a:rPr lang="en-US" dirty="0"/>
+              <a:rPr lang="en-US"/>
               <a:t>Show the two pools and how they are subject to curtailment through CPM.</a:t>
             </a:r>
           </a:p>
           <a:p>
             <a:r>
-              <a:rPr lang="en-US" dirty="0"/>
+              <a:rPr lang="en-US"/>
               <a:t>How long has this CPM stage structure been in place?</a:t>
             </a:r>
           </a:p>
@@ -5087,7 +5074,7 @@
           <a:lstStyle/>
           <a:p>
             <a:r>
-              <a:rPr lang="en-US" dirty="0"/>
+              <a:rPr lang="en-US"/>
               <a:t>CPM implementation down through the years</a:t>
             </a:r>
           </a:p>
@@ -5123,6 +5110,22 @@
             <a:r>
               <a:rPr lang="en-US" dirty="0"/>
               <a:t>How often have we been in various CPM stages since 2013? How much pumping has been curtailed as a result?</a:t>
+            </a:r>
+          </a:p>
+          <a:p>
+            <a:r>
+              <a:rPr lang="en-US" dirty="0"/>
+              <a:t>Graph 1 – both pools combined, permit types combined, auth, pumped, unpumped.</a:t>
+            </a:r>
+          </a:p>
+          <a:p>
+            <a:r>
+              <a:rPr lang="en-US" dirty="0"/>
+              <a:t>Graph 2 – 4 panel, broken out by each pool and mandi </a:t>
+            </a:r>
+            <a:r>
+              <a:rPr lang="en-US"/>
+              <a:t>+ irrigation</a:t>
             </a:r>
           </a:p>
           <a:p>
@@ -5224,51 +5227,51 @@
           <a:lstStyle/>
           <a:p>
             <a:r>
-              <a:rPr lang="en-US" dirty="0"/>
+              <a:rPr lang="en-US"/>
               <a:t>Why were additional </a:t>
             </a:r>
             <a:r>
-              <a:rPr lang="en-US" dirty="0" err="1"/>
+              <a:rPr lang="en-US" err="1"/>
               <a:t>springflow</a:t>
             </a:r>
             <a:r>
-              <a:rPr lang="en-US" dirty="0"/>
+              <a:rPr lang="en-US"/>
               <a:t> protection measures needed?</a:t>
             </a:r>
           </a:p>
           <a:p>
             <a:r>
-              <a:rPr lang="en-US" dirty="0"/>
+              <a:rPr lang="en-US"/>
               <a:t>We couldn’t meet the minimum level of flow required by the extent of federal law to protect the </a:t>
             </a:r>
             <a:r>
-              <a:rPr lang="en-US" dirty="0" err="1"/>
+              <a:rPr lang="en-US" err="1"/>
               <a:t>speceis</a:t>
             </a:r>
             <a:r>
-              <a:rPr lang="en-US" dirty="0"/>
+              <a:rPr lang="en-US"/>
               <a:t>.</a:t>
             </a:r>
           </a:p>
           <a:p>
             <a:r>
-              <a:rPr lang="en-US" dirty="0"/>
+              <a:rPr lang="en-US"/>
               <a:t>Introduce </a:t>
             </a:r>
             <a:r>
-              <a:rPr lang="en-US" dirty="0" err="1"/>
+              <a:rPr lang="en-US" err="1"/>
               <a:t>larry</a:t>
             </a:r>
             <a:r>
-              <a:rPr lang="en-US" dirty="0"/>
+              <a:rPr lang="en-US"/>
               <a:t> land/</a:t>
             </a:r>
             <a:r>
-              <a:rPr lang="en-US" dirty="0" err="1"/>
+              <a:rPr lang="en-US" err="1"/>
               <a:t>sam</a:t>
             </a:r>
             <a:r>
-              <a:rPr lang="en-US" dirty="0"/>
+              <a:rPr lang="en-US"/>
               <a:t> Vaugh and bottom-up package</a:t>
             </a:r>
           </a:p>

--- a/springflow_protection.pptx
+++ b/springflow_protection.pptx
@@ -119,6 +119,11 @@
       </a:defRPr>
     </a:lvl9pPr>
   </p:defaultTextStyle>
+  <p:extLst>
+    <p:ext uri="{EFAFB233-063F-42B5-8137-9DF3F51BA10A}">
+      <p15:sldGuideLst xmlns:p15="http://schemas.microsoft.com/office/powerpoint/2012/main"/>
+    </p:ext>
+  </p:extLst>
 </p:presentation>
 </file>
 
@@ -180,7 +185,7 @@
   <pc:docChgLst>
     <pc:chgData name="Chad Furl" userId="e1f063c0-f891-481e-b162-0b825299f031" providerId="ADAL" clId="{3E978C21-B3D0-4285-96BE-5AD851B5E1C0}"/>
     <pc:docChg chg="undo custSel addSld modSld sldOrd">
-      <pc:chgData name="Chad Furl" userId="e1f063c0-f891-481e-b162-0b825299f031" providerId="ADAL" clId="{3E978C21-B3D0-4285-96BE-5AD851B5E1C0}" dt="2026-07-24T20:17:57.611" v="2119" actId="20577"/>
+      <pc:chgData name="Chad Furl" userId="e1f063c0-f891-481e-b162-0b825299f031" providerId="ADAL" clId="{3E978C21-B3D0-4285-96BE-5AD851B5E1C0}" dt="2026-07-27T18:54:38.289" v="2170" actId="20577"/>
       <pc:docMkLst>
         <pc:docMk/>
       </pc:docMkLst>
@@ -277,7 +282,7 @@
         </pc:spChg>
       </pc:sldChg>
       <pc:sldChg chg="modSp add mod">
-        <pc:chgData name="Chad Furl" userId="e1f063c0-f891-481e-b162-0b825299f031" providerId="ADAL" clId="{3E978C21-B3D0-4285-96BE-5AD851B5E1C0}" dt="2026-07-20T21:24:49.911" v="1862" actId="20577"/>
+        <pc:chgData name="Chad Furl" userId="e1f063c0-f891-481e-b162-0b825299f031" providerId="ADAL" clId="{3E978C21-B3D0-4285-96BE-5AD851B5E1C0}" dt="2026-07-27T18:54:38.289" v="2170" actId="20577"/>
         <pc:sldMkLst>
           <pc:docMk/>
           <pc:sldMk cId="3828646604" sldId="262"/>
@@ -291,7 +296,7 @@
           </ac:spMkLst>
         </pc:spChg>
         <pc:spChg chg="mod">
-          <ac:chgData name="Chad Furl" userId="e1f063c0-f891-481e-b162-0b825299f031" providerId="ADAL" clId="{3E978C21-B3D0-4285-96BE-5AD851B5E1C0}" dt="2026-07-20T21:24:49.911" v="1862" actId="20577"/>
+          <ac:chgData name="Chad Furl" userId="e1f063c0-f891-481e-b162-0b825299f031" providerId="ADAL" clId="{3E978C21-B3D0-4285-96BE-5AD851B5E1C0}" dt="2026-07-27T18:54:38.289" v="2170" actId="20577"/>
           <ac:spMkLst>
             <pc:docMk/>
             <pc:sldMk cId="3828646604" sldId="262"/>
@@ -602,7 +607,7 @@
           <a:p>
             <a:fld id="{B08F4C1E-3527-44F2-9D59-10FE85C7F17B}" type="datetimeFigureOut">
               <a:rPr lang="en-US" smtClean="0"/>
-              <a:t>7/24/2026</a:t>
+              <a:t>7/27/2026</a:t>
             </a:fld>
             <a:endParaRPr lang="en-US"/>
           </a:p>
@@ -800,7 +805,7 @@
           <a:p>
             <a:fld id="{B08F4C1E-3527-44F2-9D59-10FE85C7F17B}" type="datetimeFigureOut">
               <a:rPr lang="en-US" smtClean="0"/>
-              <a:t>7/24/2026</a:t>
+              <a:t>7/27/2026</a:t>
             </a:fld>
             <a:endParaRPr lang="en-US"/>
           </a:p>
@@ -1008,7 +1013,7 @@
           <a:p>
             <a:fld id="{B08F4C1E-3527-44F2-9D59-10FE85C7F17B}" type="datetimeFigureOut">
               <a:rPr lang="en-US" smtClean="0"/>
-              <a:t>7/24/2026</a:t>
+              <a:t>7/27/2026</a:t>
             </a:fld>
             <a:endParaRPr lang="en-US"/>
           </a:p>
@@ -1206,7 +1211,7 @@
           <a:p>
             <a:fld id="{B08F4C1E-3527-44F2-9D59-10FE85C7F17B}" type="datetimeFigureOut">
               <a:rPr lang="en-US" smtClean="0"/>
-              <a:t>7/24/2026</a:t>
+              <a:t>7/27/2026</a:t>
             </a:fld>
             <a:endParaRPr lang="en-US"/>
           </a:p>
@@ -1481,7 +1486,7 @@
           <a:p>
             <a:fld id="{B08F4C1E-3527-44F2-9D59-10FE85C7F17B}" type="datetimeFigureOut">
               <a:rPr lang="en-US" smtClean="0"/>
-              <a:t>7/24/2026</a:t>
+              <a:t>7/27/2026</a:t>
             </a:fld>
             <a:endParaRPr lang="en-US"/>
           </a:p>
@@ -1746,7 +1751,7 @@
           <a:p>
             <a:fld id="{B08F4C1E-3527-44F2-9D59-10FE85C7F17B}" type="datetimeFigureOut">
               <a:rPr lang="en-US" smtClean="0"/>
-              <a:t>7/24/2026</a:t>
+              <a:t>7/27/2026</a:t>
             </a:fld>
             <a:endParaRPr lang="en-US"/>
           </a:p>
@@ -2158,7 +2163,7 @@
           <a:p>
             <a:fld id="{B08F4C1E-3527-44F2-9D59-10FE85C7F17B}" type="datetimeFigureOut">
               <a:rPr lang="en-US" smtClean="0"/>
-              <a:t>7/24/2026</a:t>
+              <a:t>7/27/2026</a:t>
             </a:fld>
             <a:endParaRPr lang="en-US"/>
           </a:p>
@@ -2299,7 +2304,7 @@
           <a:p>
             <a:fld id="{B08F4C1E-3527-44F2-9D59-10FE85C7F17B}" type="datetimeFigureOut">
               <a:rPr lang="en-US" smtClean="0"/>
-              <a:t>7/24/2026</a:t>
+              <a:t>7/27/2026</a:t>
             </a:fld>
             <a:endParaRPr lang="en-US"/>
           </a:p>
@@ -2412,7 +2417,7 @@
           <a:p>
             <a:fld id="{B08F4C1E-3527-44F2-9D59-10FE85C7F17B}" type="datetimeFigureOut">
               <a:rPr lang="en-US" smtClean="0"/>
-              <a:t>7/24/2026</a:t>
+              <a:t>7/27/2026</a:t>
             </a:fld>
             <a:endParaRPr lang="en-US"/>
           </a:p>
@@ -2723,7 +2728,7 @@
           <a:p>
             <a:fld id="{B08F4C1E-3527-44F2-9D59-10FE85C7F17B}" type="datetimeFigureOut">
               <a:rPr lang="en-US" smtClean="0"/>
-              <a:t>7/24/2026</a:t>
+              <a:t>7/27/2026</a:t>
             </a:fld>
             <a:endParaRPr lang="en-US"/>
           </a:p>
@@ -3011,7 +3016,7 @@
           <a:p>
             <a:fld id="{B08F4C1E-3527-44F2-9D59-10FE85C7F17B}" type="datetimeFigureOut">
               <a:rPr lang="en-US" smtClean="0"/>
-              <a:t>7/24/2026</a:t>
+              <a:t>7/27/2026</a:t>
             </a:fld>
             <a:endParaRPr lang="en-US"/>
           </a:p>
@@ -3252,7 +3257,7 @@
           <a:p>
             <a:fld id="{B08F4C1E-3527-44F2-9D59-10FE85C7F17B}" type="datetimeFigureOut">
               <a:rPr lang="en-US" smtClean="0"/>
-              <a:t>7/24/2026</a:t>
+              <a:t>7/27/2026</a:t>
             </a:fld>
             <a:endParaRPr lang="en-US"/>
           </a:p>
@@ -4186,28 +4191,42 @@
           <a:lstStyle/>
           <a:p>
             <a:r>
-              <a:rPr lang="en-US"/>
+              <a:rPr lang="en-US" dirty="0"/>
               <a:t>How often have SF measures been triggered? How much pumping has been curtailed as a result?</a:t>
             </a:r>
           </a:p>
           <a:p>
             <a:r>
-              <a:rPr lang="en-US"/>
+              <a:rPr lang="en-US" dirty="0"/>
               <a:t>What is the estimated vs authorized pumping for 2013 to present.</a:t>
             </a:r>
           </a:p>
           <a:p>
             <a:r>
-              <a:rPr lang="en-US"/>
+              <a:rPr lang="en-US" dirty="0"/>
               <a:t>J17/</a:t>
             </a:r>
             <a:r>
-              <a:rPr lang="en-US" err="1"/>
+              <a:rPr lang="en-US" dirty="0" err="1"/>
               <a:t>springflow</a:t>
             </a:r>
             <a:r>
-              <a:rPr lang="en-US"/>
-              <a:t> notes</a:t>
+              <a:rPr lang="en-US" dirty="0"/>
+              <a:t> notes.</a:t>
+            </a:r>
+          </a:p>
+          <a:p>
+            <a:r>
+              <a:rPr lang="en-US" dirty="0"/>
+              <a:t>Perhaps a slide looking at </a:t>
+            </a:r>
+            <a:r>
+              <a:rPr lang="en-US" dirty="0" err="1"/>
+              <a:t>precip</a:t>
+            </a:r>
+            <a:r>
+              <a:rPr lang="en-US"/>
+              <a:t>/recharge</a:t>
             </a:r>
           </a:p>
         </p:txBody>
